--- a/assets/powerpoints/module-n2-inscription/B2-le-7-septembre-pas-le-9-juillet.pptx
+++ b/assets/powerpoints/module-n2-inscription/B2-le-7-septembre-pas-le-9-juillet.pptx
@@ -10024,7 +10024,43 @@
                 </a:solidFill>
                 <a:latin typeface="Verdana"/>
               </a:rPr>
-              <a:t>Dans cette écriture, au Québec, le premier nombre est le &lt;b&gt;jour&lt;/b&gt; et le deuxième est le &lt;b&gt;mois&lt;/b&gt;. C'est l'inverse de l'habitude américaine, et l'erreur coûte deux mois : on se présente le mauvais jour, à la mauvaise saison.</a:t>
+              <a:t>Dans cette écriture, au Québec, le premier nombre est le </a:t>
+            </a:r>
+            <a:r>
+              <a:rPr sz="2000" b="1" i="0">
+                <a:solidFill>
+                  <a:srgbClr val="4B4F52"/>
+                </a:solidFill>
+                <a:latin typeface="Verdana"/>
+              </a:rPr>
+              <a:t>jour</a:t>
+            </a:r>
+            <a:r>
+              <a:rPr sz="2000" b="0" i="0">
+                <a:solidFill>
+                  <a:srgbClr val="4B4F52"/>
+                </a:solidFill>
+                <a:latin typeface="Verdana"/>
+              </a:rPr>
+              <a:t> et le deuxième est le </a:t>
+            </a:r>
+            <a:r>
+              <a:rPr sz="2000" b="1" i="0">
+                <a:solidFill>
+                  <a:srgbClr val="4B4F52"/>
+                </a:solidFill>
+                <a:latin typeface="Verdana"/>
+              </a:rPr>
+              <a:t>mois</a:t>
+            </a:r>
+            <a:r>
+              <a:rPr sz="2000" b="0" i="0">
+                <a:solidFill>
+                  <a:srgbClr val="4B4F52"/>
+                </a:solidFill>
+                <a:latin typeface="Verdana"/>
+              </a:rPr>
+              <a:t>. C'est l'inverse de l'habitude américaine, et l'erreur coûte deux mois : on se présente le mauvais jour, à la mauvaise saison.</a:t>
             </a:r>
           </a:p>
         </p:txBody>
@@ -13694,7 +13730,25 @@
                 </a:solidFill>
                 <a:latin typeface="Verdana"/>
               </a:rPr>
-              <a:t>On ne recopie jamais une annonce : personne ne relit un paragraphe. Quatre lignes se relisent en dix secondes, dans l'autobus. Et les chiffres se copient &lt;b&gt;en regardant&lt;/b&gt; l'annonce, jamais de mémoire.</a:t>
+              <a:t>On ne recopie jamais une annonce : personne ne relit un paragraphe. Quatre lignes se relisent en dix secondes, dans l'autobus. Et les chiffres se copient </a:t>
+            </a:r>
+            <a:r>
+              <a:rPr sz="2000" b="1" i="0">
+                <a:solidFill>
+                  <a:srgbClr val="4B4F52"/>
+                </a:solidFill>
+                <a:latin typeface="Verdana"/>
+              </a:rPr>
+              <a:t>en regardant</a:t>
+            </a:r>
+            <a:r>
+              <a:rPr sz="2000" b="0" i="0">
+                <a:solidFill>
+                  <a:srgbClr val="4B4F52"/>
+                </a:solidFill>
+                <a:latin typeface="Verdana"/>
+              </a:rPr>
+              <a:t> l'annonce, jamais de mémoire.</a:t>
             </a:r>
           </a:p>
         </p:txBody>
